--- a/proposals/機種分析/いざ番長/bansho_guide_v1.pptx
+++ b/proposals/機種分析/いざ番長/bansho_guide_v1.pptx
@@ -3363,7 +3363,7 @@
         <p:spPr>
           <a:xfrm>
             <a:off x="201168" y="2743200"/>
-            <a:ext cx="1691640" cy="220000"/>
+            <a:ext cx="1691640" cy="185000"/>
           </a:xfrm>
           <a:prstGeom prst="rect">
             <a:avLst/>
@@ -3378,7 +3378,7 @@
           <a:p>
             <a:pPr algn="l"/>
             <a:r>
-              <a:rPr sz="750" b="0">
+              <a:rPr sz="700" b="0">
                 <a:solidFill>
                   <a:srgbClr val="8890AA"/>
                 </a:solidFill>
@@ -3398,7 +3398,7 @@
         <p:spPr>
           <a:xfrm>
             <a:off x="1920240" y="2743200"/>
-            <a:ext cx="2834640" cy="220000"/>
+            <a:ext cx="2834640" cy="185000"/>
           </a:xfrm>
           <a:prstGeom prst="rect">
             <a:avLst/>
@@ -3413,7 +3413,7 @@
           <a:p>
             <a:pPr algn="l"/>
             <a:r>
-              <a:rPr sz="750" b="1">
+              <a:rPr sz="700" b="1">
                 <a:solidFill>
                   <a:srgbClr val="F0ECE8"/>
                 </a:solidFill>
@@ -3432,8 +3432,8 @@
         </p:nvSpPr>
         <p:spPr>
           <a:xfrm>
-            <a:off x="201168" y="2983200"/>
-            <a:ext cx="1691640" cy="220000"/>
+            <a:off x="201168" y="2943200"/>
+            <a:ext cx="1691640" cy="185000"/>
           </a:xfrm>
           <a:prstGeom prst="rect">
             <a:avLst/>
@@ -3448,7 +3448,7 @@
           <a:p>
             <a:pPr algn="l"/>
             <a:r>
-              <a:rPr sz="750" b="0">
+              <a:rPr sz="700" b="0">
                 <a:solidFill>
                   <a:srgbClr val="8890AA"/>
                 </a:solidFill>
@@ -3467,8 +3467,8 @@
         </p:nvSpPr>
         <p:spPr>
           <a:xfrm>
-            <a:off x="1920240" y="2983200"/>
-            <a:ext cx="2834640" cy="220000"/>
+            <a:off x="1920240" y="2943200"/>
+            <a:ext cx="2834640" cy="185000"/>
           </a:xfrm>
           <a:prstGeom prst="rect">
             <a:avLst/>
@@ -3483,7 +3483,7 @@
           <a:p>
             <a:pPr algn="l"/>
             <a:r>
-              <a:rPr sz="750" b="1">
+              <a:rPr sz="700" b="1">
                 <a:solidFill>
                   <a:srgbClr val="F0ECE8"/>
                 </a:solidFill>
@@ -3502,8 +3502,8 @@
         </p:nvSpPr>
         <p:spPr>
           <a:xfrm>
-            <a:off x="201168" y="3223200"/>
-            <a:ext cx="1691640" cy="220000"/>
+            <a:off x="201168" y="3143200"/>
+            <a:ext cx="1691640" cy="185000"/>
           </a:xfrm>
           <a:prstGeom prst="rect">
             <a:avLst/>
@@ -3518,7 +3518,7 @@
           <a:p>
             <a:pPr algn="l"/>
             <a:r>
-              <a:rPr sz="750" b="0">
+              <a:rPr sz="700" b="0">
                 <a:solidFill>
                   <a:srgbClr val="8890AA"/>
                 </a:solidFill>
@@ -3537,8 +3537,8 @@
         </p:nvSpPr>
         <p:spPr>
           <a:xfrm>
-            <a:off x="1920240" y="3223200"/>
-            <a:ext cx="2834640" cy="220000"/>
+            <a:off x="1920240" y="3143200"/>
+            <a:ext cx="2834640" cy="185000"/>
           </a:xfrm>
           <a:prstGeom prst="rect">
             <a:avLst/>
@@ -3553,7 +3553,7 @@
           <a:p>
             <a:pPr algn="l"/>
             <a:r>
-              <a:rPr sz="750" b="1">
+              <a:rPr sz="700" b="1">
                 <a:solidFill>
                   <a:srgbClr val="F0ECE8"/>
                 </a:solidFill>
@@ -3572,8 +3572,8 @@
         </p:nvSpPr>
         <p:spPr>
           <a:xfrm>
-            <a:off x="201168" y="3463200"/>
-            <a:ext cx="1691640" cy="220000"/>
+            <a:off x="201168" y="3343200"/>
+            <a:ext cx="1691640" cy="185000"/>
           </a:xfrm>
           <a:prstGeom prst="rect">
             <a:avLst/>
@@ -3588,7 +3588,7 @@
           <a:p>
             <a:pPr algn="l"/>
             <a:r>
-              <a:rPr sz="750" b="0">
+              <a:rPr sz="700" b="0">
                 <a:solidFill>
                   <a:srgbClr val="8890AA"/>
                 </a:solidFill>
@@ -3607,8 +3607,8 @@
         </p:nvSpPr>
         <p:spPr>
           <a:xfrm>
-            <a:off x="1920240" y="3463200"/>
-            <a:ext cx="2834640" cy="220000"/>
+            <a:off x="1920240" y="3343200"/>
+            <a:ext cx="2834640" cy="185000"/>
           </a:xfrm>
           <a:prstGeom prst="rect">
             <a:avLst/>
@@ -3623,7 +3623,7 @@
           <a:p>
             <a:pPr algn="l"/>
             <a:r>
-              <a:rPr sz="750" b="1">
+              <a:rPr sz="700" b="1">
                 <a:solidFill>
                   <a:srgbClr val="F0ECE8"/>
                 </a:solidFill>
@@ -3642,8 +3642,8 @@
         </p:nvSpPr>
         <p:spPr>
           <a:xfrm>
-            <a:off x="201168" y="3703200"/>
-            <a:ext cx="1691640" cy="220000"/>
+            <a:off x="201168" y="3543200"/>
+            <a:ext cx="1691640" cy="185000"/>
           </a:xfrm>
           <a:prstGeom prst="rect">
             <a:avLst/>
@@ -3658,7 +3658,7 @@
           <a:p>
             <a:pPr algn="l"/>
             <a:r>
-              <a:rPr sz="750" b="0">
+              <a:rPr sz="700" b="0">
                 <a:solidFill>
                   <a:srgbClr val="8890AA"/>
                 </a:solidFill>
@@ -3677,8 +3677,8 @@
         </p:nvSpPr>
         <p:spPr>
           <a:xfrm>
-            <a:off x="1920240" y="3703200"/>
-            <a:ext cx="2834640" cy="220000"/>
+            <a:off x="1920240" y="3543200"/>
+            <a:ext cx="2834640" cy="185000"/>
           </a:xfrm>
           <a:prstGeom prst="rect">
             <a:avLst/>
@@ -3693,7 +3693,7 @@
           <a:p>
             <a:pPr algn="l"/>
             <a:r>
-              <a:rPr sz="750" b="1">
+              <a:rPr sz="700" b="1">
                 <a:solidFill>
                   <a:srgbClr val="F0ECE8"/>
                 </a:solidFill>
@@ -3712,8 +3712,78 @@
         </p:nvSpPr>
         <p:spPr>
           <a:xfrm>
+            <a:off x="201168" y="3743200"/>
+            <a:ext cx="1691640" cy="185000"/>
+          </a:xfrm>
+          <a:prstGeom prst="rect">
+            <a:avLst/>
+          </a:prstGeom>
+          <a:noFill/>
+        </p:spPr>
+        <p:txBody>
+          <a:bodyPr wrap="square">
+            <a:spAutoFit/>
+          </a:bodyPr>
+          <a:lstStyle/>
+          <a:p>
+            <a:pPr algn="l"/>
+            <a:r>
+              <a:rPr sz="700" b="0">
+                <a:solidFill>
+                  <a:srgbClr val="8890AA"/>
+                </a:solidFill>
+                <a:latin typeface="メイリオ"/>
+              </a:rPr>
+              <a:t>設定6機械割</a:t>
+            </a:r>
+          </a:p>
+        </p:txBody>
+      </p:sp>
+      <p:sp>
+        <p:nvSpPr>
+          <p:cNvPr id="20" name="TextBox 19"/>
+          <p:cNvSpPr txBox="1"/>
+          <p:nvPr/>
+        </p:nvSpPr>
+        <p:spPr>
+          <a:xfrm>
+            <a:off x="1920240" y="3743200"/>
+            <a:ext cx="2834640" cy="185000"/>
+          </a:xfrm>
+          <a:prstGeom prst="rect">
+            <a:avLst/>
+          </a:prstGeom>
+          <a:noFill/>
+        </p:spPr>
+        <p:txBody>
+          <a:bodyPr wrap="square">
+            <a:spAutoFit/>
+          </a:bodyPr>
+          <a:lstStyle/>
+          <a:p>
+            <a:pPr algn="l"/>
+            <a:r>
+              <a:rPr sz="700" b="1">
+                <a:solidFill>
+                  <a:srgbClr val="F0ECE8"/>
+                </a:solidFill>
+                <a:latin typeface="メイリオ"/>
+              </a:rPr>
+              <a:t>約111%</a:t>
+            </a:r>
+          </a:p>
+        </p:txBody>
+      </p:sp>
+      <p:sp>
+        <p:nvSpPr>
+          <p:cNvPr id="21" name="TextBox 20"/>
+          <p:cNvSpPr txBox="1"/>
+          <p:nvPr/>
+        </p:nvSpPr>
+        <p:spPr>
+          <a:xfrm>
             <a:off x="201168" y="3943200"/>
-            <a:ext cx="1691640" cy="220000"/>
+            <a:ext cx="1691640" cy="185000"/>
           </a:xfrm>
           <a:prstGeom prst="rect">
             <a:avLst/>
@@ -3728,27 +3798,27 @@
           <a:p>
             <a:pPr algn="l"/>
             <a:r>
-              <a:rPr sz="750" b="0">
+              <a:rPr sz="700" b="0">
                 <a:solidFill>
                   <a:srgbClr val="8890AA"/>
                 </a:solidFill>
                 <a:latin typeface="メイリオ"/>
               </a:rPr>
-              <a:t>設定6機械割</a:t>
-            </a:r>
-          </a:p>
-        </p:txBody>
-      </p:sp>
-      <p:sp>
-        <p:nvSpPr>
-          <p:cNvPr id="20" name="TextBox 19"/>
+              <a:t>天井</a:t>
+            </a:r>
+          </a:p>
+        </p:txBody>
+      </p:sp>
+      <p:sp>
+        <p:nvSpPr>
+          <p:cNvPr id="22" name="TextBox 21"/>
           <p:cNvSpPr txBox="1"/>
           <p:nvPr/>
         </p:nvSpPr>
         <p:spPr>
           <a:xfrm>
             <a:off x="1920240" y="3943200"/>
-            <a:ext cx="2834640" cy="220000"/>
+            <a:ext cx="2834640" cy="185000"/>
           </a:xfrm>
           <a:prstGeom prst="rect">
             <a:avLst/>
@@ -3763,27 +3833,27 @@
           <a:p>
             <a:pPr algn="l"/>
             <a:r>
-              <a:rPr sz="750" b="1">
+              <a:rPr sz="700" b="1">
                 <a:solidFill>
                   <a:srgbClr val="F0ECE8"/>
                 </a:solidFill>
                 <a:latin typeface="メイリオ"/>
               </a:rPr>
-              <a:t>約111%</a:t>
-            </a:r>
-          </a:p>
-        </p:txBody>
-      </p:sp>
-      <p:sp>
-        <p:nvSpPr>
-          <p:cNvPr id="21" name="TextBox 20"/>
-          <p:cNvSpPr txBox="1"/>
-          <p:nvPr/>
-        </p:nvSpPr>
-        <p:spPr>
-          <a:xfrm>
-            <a:off x="201168" y="4183200"/>
-            <a:ext cx="1691640" cy="220000"/>
+              <a:t>モード別規定G数（モード管理型）</a:t>
+            </a:r>
+          </a:p>
+        </p:txBody>
+      </p:sp>
+      <p:sp>
+        <p:nvSpPr>
+          <p:cNvPr id="23" name="TextBox 22"/>
+          <p:cNvSpPr txBox="1"/>
+          <p:nvPr/>
+        </p:nvSpPr>
+        <p:spPr>
+          <a:xfrm>
+            <a:off x="201168" y="4143200"/>
+            <a:ext cx="1691640" cy="185000"/>
           </a:xfrm>
           <a:prstGeom prst="rect">
             <a:avLst/>
@@ -3798,27 +3868,27 @@
           <a:p>
             <a:pPr algn="l"/>
             <a:r>
-              <a:rPr sz="750" b="0">
+              <a:rPr sz="700" b="0">
                 <a:solidFill>
                   <a:srgbClr val="8890AA"/>
                 </a:solidFill>
                 <a:latin typeface="メイリオ"/>
               </a:rPr>
-              <a:t>天井</a:t>
-            </a:r>
-          </a:p>
-        </p:txBody>
-      </p:sp>
-      <p:sp>
-        <p:nvSpPr>
-          <p:cNvPr id="22" name="TextBox 21"/>
-          <p:cNvSpPr txBox="1"/>
-          <p:nvPr/>
-        </p:nvSpPr>
-        <p:spPr>
-          <a:xfrm>
-            <a:off x="1920240" y="4183200"/>
-            <a:ext cx="2834640" cy="220000"/>
+              <a:t>引き戻し状態</a:t>
+            </a:r>
+          </a:p>
+        </p:txBody>
+      </p:sp>
+      <p:sp>
+        <p:nvSpPr>
+          <p:cNvPr id="24" name="TextBox 23"/>
+          <p:cNvSpPr txBox="1"/>
+          <p:nvPr/>
+        </p:nvSpPr>
+        <p:spPr>
+          <a:xfrm>
+            <a:off x="1920240" y="4143200"/>
+            <a:ext cx="2834640" cy="185000"/>
           </a:xfrm>
           <a:prstGeom prst="rect">
             <a:avLst/>
@@ -3833,27 +3903,27 @@
           <a:p>
             <a:pPr algn="l"/>
             <a:r>
-              <a:rPr sz="750" b="1">
+              <a:rPr sz="700" b="1">
                 <a:solidFill>
                   <a:srgbClr val="F0ECE8"/>
                 </a:solidFill>
                 <a:latin typeface="メイリオ"/>
               </a:rPr>
-              <a:t>モード別規定G数（モード管理型）</a:t>
-            </a:r>
-          </a:p>
-        </p:txBody>
-      </p:sp>
-      <p:sp>
-        <p:nvSpPr>
-          <p:cNvPr id="23" name="TextBox 22"/>
-          <p:cNvSpPr txBox="1"/>
-          <p:nvPr/>
-        </p:nvSpPr>
-        <p:spPr>
-          <a:xfrm>
-            <a:off x="201168" y="4423200"/>
-            <a:ext cx="1691640" cy="220000"/>
+              <a:t>AT終了後あり（前兆確認後ヤメ）</a:t>
+            </a:r>
+          </a:p>
+        </p:txBody>
+      </p:sp>
+      <p:sp>
+        <p:nvSpPr>
+          <p:cNvPr id="25" name="TextBox 24"/>
+          <p:cNvSpPr txBox="1"/>
+          <p:nvPr/>
+        </p:nvSpPr>
+        <p:spPr>
+          <a:xfrm>
+            <a:off x="201168" y="4343200"/>
+            <a:ext cx="1691640" cy="185000"/>
           </a:xfrm>
           <a:prstGeom prst="rect">
             <a:avLst/>
@@ -3868,27 +3938,27 @@
           <a:p>
             <a:pPr algn="l"/>
             <a:r>
-              <a:rPr sz="750" b="0">
+              <a:rPr sz="700" b="0">
                 <a:solidFill>
                   <a:srgbClr val="8890AA"/>
                 </a:solidFill>
                 <a:latin typeface="メイリオ"/>
               </a:rPr>
-              <a:t>AT初当り引き戻し</a:t>
-            </a:r>
-          </a:p>
-        </p:txBody>
-      </p:sp>
-      <p:sp>
-        <p:nvSpPr>
-          <p:cNvPr id="24" name="TextBox 23"/>
-          <p:cNvSpPr txBox="1"/>
-          <p:nvPr/>
-        </p:nvSpPr>
-        <p:spPr>
-          <a:xfrm>
-            <a:off x="1920240" y="4423200"/>
-            <a:ext cx="2834640" cy="220000"/>
+              <a:t>特徴</a:t>
+            </a:r>
+          </a:p>
+        </p:txBody>
+      </p:sp>
+      <p:sp>
+        <p:nvSpPr>
+          <p:cNvPr id="26" name="TextBox 25"/>
+          <p:cNvSpPr txBox="1"/>
+          <p:nvPr/>
+        </p:nvSpPr>
+        <p:spPr>
+          <a:xfrm>
+            <a:off x="1920240" y="4343200"/>
+            <a:ext cx="2834640" cy="185000"/>
           </a:xfrm>
           <a:prstGeom prst="rect">
             <a:avLst/>
@@ -3903,83 +3973,13 @@
           <a:p>
             <a:pPr algn="l"/>
             <a:r>
-              <a:rPr sz="750" b="1">
+              <a:rPr sz="700" b="1">
                 <a:solidFill>
                   <a:srgbClr val="F0ECE8"/>
                 </a:solidFill>
                 <a:latin typeface="メイリオ"/>
               </a:rPr>
-              <a:t>AT終了後に引き戻し状態あり（前兆確認要）</a:t>
-            </a:r>
-          </a:p>
-        </p:txBody>
-      </p:sp>
-      <p:sp>
-        <p:nvSpPr>
-          <p:cNvPr id="25" name="TextBox 24"/>
-          <p:cNvSpPr txBox="1"/>
-          <p:nvPr/>
-        </p:nvSpPr>
-        <p:spPr>
-          <a:xfrm>
-            <a:off x="201168" y="4663200"/>
-            <a:ext cx="1691640" cy="220000"/>
-          </a:xfrm>
-          <a:prstGeom prst="rect">
-            <a:avLst/>
-          </a:prstGeom>
-          <a:noFill/>
-        </p:spPr>
-        <p:txBody>
-          <a:bodyPr wrap="square">
-            <a:spAutoFit/>
-          </a:bodyPr>
-          <a:lstStyle/>
-          <a:p>
-            <a:pPr algn="l"/>
-            <a:r>
-              <a:rPr sz="750" b="0">
-                <a:solidFill>
-                  <a:srgbClr val="8890AA"/>
-                </a:solidFill>
-                <a:latin typeface="メイリオ"/>
-              </a:rPr>
-              <a:t>特徴</a:t>
-            </a:r>
-          </a:p>
-        </p:txBody>
-      </p:sp>
-      <p:sp>
-        <p:nvSpPr>
-          <p:cNvPr id="26" name="TextBox 25"/>
-          <p:cNvSpPr txBox="1"/>
-          <p:nvPr/>
-        </p:nvSpPr>
-        <p:spPr>
-          <a:xfrm>
-            <a:off x="1920240" y="4663200"/>
-            <a:ext cx="2834640" cy="220000"/>
-          </a:xfrm>
-          <a:prstGeom prst="rect">
-            <a:avLst/>
-          </a:prstGeom>
-          <a:noFill/>
-        </p:spPr>
-        <p:txBody>
-          <a:bodyPr wrap="square">
-            <a:spAutoFit/>
-          </a:bodyPr>
-          <a:lstStyle/>
-          <a:p>
-            <a:pPr algn="l"/>
-            <a:r>
-              <a:rPr sz="750" b="1">
-                <a:solidFill>
-                  <a:srgbClr val="F0ECE8"/>
-                </a:solidFill>
-                <a:latin typeface="メイリオ"/>
-              </a:rPr>
-              <a:t>絶頂輪廻ループ・刺客ゾーン(CZ)・番長ボーナス</a:t>
+              <a:t>絶頂輪廻ループ・刺客ゾーン(CZ)・番長BB</a:t>
             </a:r>
           </a:p>
         </p:txBody>
@@ -5786,8 +5786,8 @@
         </p:nvSpPr>
         <p:spPr>
           <a:xfrm>
-            <a:off x="256032" y="1993392"/>
-            <a:ext cx="1783080" cy="1080000"/>
+            <a:off x="274320" y="1993392"/>
+            <a:ext cx="1508760" cy="1080000"/>
           </a:xfrm>
           <a:prstGeom prst="rect">
             <a:avLst/>
@@ -5831,23 +5831,23 @@
         </p:nvSpPr>
         <p:spPr>
           <a:xfrm>
-            <a:off x="296032" y="2063392"/>
-            <a:ext cx="1713080" cy="370000"/>
-          </a:xfrm>
-          <a:prstGeom prst="rect">
-            <a:avLst/>
-          </a:prstGeom>
-          <a:noFill/>
-        </p:spPr>
-        <p:txBody>
-          <a:bodyPr wrap="square">
-            <a:spAutoFit/>
-          </a:bodyPr>
-          <a:lstStyle/>
-          <a:p>
-            <a:pPr algn="ctr"/>
-            <a:r>
-              <a:rPr sz="1000" b="1">
+            <a:off x="309320" y="2063392"/>
+            <a:ext cx="1448760" cy="370000"/>
+          </a:xfrm>
+          <a:prstGeom prst="rect">
+            <a:avLst/>
+          </a:prstGeom>
+          <a:noFill/>
+        </p:spPr>
+        <p:txBody>
+          <a:bodyPr wrap="square">
+            <a:spAutoFit/>
+          </a:bodyPr>
+          <a:lstStyle/>
+          <a:p>
+            <a:pPr algn="ctr"/>
+            <a:r>
+              <a:rPr sz="950" b="1">
                 <a:solidFill>
                   <a:srgbClr val="3366FF"/>
                 </a:solidFill>
@@ -5867,23 +5867,23 @@
         </p:nvSpPr>
         <p:spPr>
           <a:xfrm>
-            <a:off x="286032" y="2483392"/>
-            <a:ext cx="1728080" cy="470000"/>
-          </a:xfrm>
-          <a:prstGeom prst="rect">
-            <a:avLst/>
-          </a:prstGeom>
-          <a:noFill/>
-        </p:spPr>
-        <p:txBody>
-          <a:bodyPr wrap="square">
-            <a:spAutoFit/>
-          </a:bodyPr>
-          <a:lstStyle/>
-          <a:p>
-            <a:pPr algn="ctr"/>
-            <a:r>
-              <a:rPr sz="800" b="0">
+            <a:off x="299320" y="2483392"/>
+            <a:ext cx="1463760" cy="470000"/>
+          </a:xfrm>
+          <a:prstGeom prst="rect">
+            <a:avLst/>
+          </a:prstGeom>
+          <a:noFill/>
+        </p:spPr>
+        <p:txBody>
+          <a:bodyPr wrap="square">
+            <a:spAutoFit/>
+          </a:bodyPr>
+          <a:lstStyle/>
+          <a:p>
+            <a:pPr algn="ctr"/>
+            <a:r>
+              <a:rPr sz="750" b="0">
                 <a:solidFill>
                   <a:srgbClr val="8890AA"/>
                 </a:solidFill>
@@ -5904,7 +5904,7 @@
         </p:nvSpPr>
         <p:spPr>
           <a:xfrm>
-            <a:off x="2051112" y="2443392"/>
+            <a:off x="1791080" y="2443392"/>
             <a:ext cx="200000" cy="180000"/>
           </a:xfrm>
           <a:prstGeom prst="can">
@@ -5947,8 +5947,8 @@
         </p:nvSpPr>
         <p:spPr>
           <a:xfrm>
-            <a:off x="2240280" y="1993392"/>
-            <a:ext cx="1783080" cy="1080000"/>
+            <a:off x="1938528" y="1993392"/>
+            <a:ext cx="1508760" cy="1080000"/>
           </a:xfrm>
           <a:prstGeom prst="rect">
             <a:avLst/>
@@ -5992,23 +5992,23 @@
         </p:nvSpPr>
         <p:spPr>
           <a:xfrm>
-            <a:off x="2280280" y="2063392"/>
-            <a:ext cx="1713080" cy="370000"/>
-          </a:xfrm>
-          <a:prstGeom prst="rect">
-            <a:avLst/>
-          </a:prstGeom>
-          <a:noFill/>
-        </p:spPr>
-        <p:txBody>
-          <a:bodyPr wrap="square">
-            <a:spAutoFit/>
-          </a:bodyPr>
-          <a:lstStyle/>
-          <a:p>
-            <a:pPr algn="ctr"/>
-            <a:r>
-              <a:rPr sz="1000" b="1">
+            <a:off x="1973528" y="2063392"/>
+            <a:ext cx="1448760" cy="370000"/>
+          </a:xfrm>
+          <a:prstGeom prst="rect">
+            <a:avLst/>
+          </a:prstGeom>
+          <a:noFill/>
+        </p:spPr>
+        <p:txBody>
+          <a:bodyPr wrap="square">
+            <a:spAutoFit/>
+          </a:bodyPr>
+          <a:lstStyle/>
+          <a:p>
+            <a:pPr algn="ctr"/>
+            <a:r>
+              <a:rPr sz="950" b="1">
                 <a:solidFill>
                   <a:srgbClr val="C8A840"/>
                 </a:solidFill>
@@ -6028,23 +6028,23 @@
         </p:nvSpPr>
         <p:spPr>
           <a:xfrm>
-            <a:off x="2270280" y="2483392"/>
-            <a:ext cx="1728080" cy="470000"/>
-          </a:xfrm>
-          <a:prstGeom prst="rect">
-            <a:avLst/>
-          </a:prstGeom>
-          <a:noFill/>
-        </p:spPr>
-        <p:txBody>
-          <a:bodyPr wrap="square">
-            <a:spAutoFit/>
-          </a:bodyPr>
-          <a:lstStyle/>
-          <a:p>
-            <a:pPr algn="ctr"/>
-            <a:r>
-              <a:rPr sz="800" b="0">
+            <a:off x="1963528" y="2483392"/>
+            <a:ext cx="1463760" cy="470000"/>
+          </a:xfrm>
+          <a:prstGeom prst="rect">
+            <a:avLst/>
+          </a:prstGeom>
+          <a:noFill/>
+        </p:spPr>
+        <p:txBody>
+          <a:bodyPr wrap="square">
+            <a:spAutoFit/>
+          </a:bodyPr>
+          <a:lstStyle/>
+          <a:p>
+            <a:pPr algn="ctr"/>
+            <a:r>
+              <a:rPr sz="750" b="0">
                 <a:solidFill>
                   <a:srgbClr val="8890AA"/>
                 </a:solidFill>
@@ -6065,7 +6065,7 @@
         </p:nvSpPr>
         <p:spPr>
           <a:xfrm>
-            <a:off x="4035360" y="2443392"/>
+            <a:off x="3455288" y="2443392"/>
             <a:ext cx="200000" cy="180000"/>
           </a:xfrm>
           <a:prstGeom prst="can">
@@ -6108,8 +6108,8 @@
         </p:nvSpPr>
         <p:spPr>
           <a:xfrm>
-            <a:off x="4224528" y="1993392"/>
-            <a:ext cx="1783080" cy="1080000"/>
+            <a:off x="3602736" y="1993392"/>
+            <a:ext cx="1508760" cy="1080000"/>
           </a:xfrm>
           <a:prstGeom prst="rect">
             <a:avLst/>
@@ -6153,23 +6153,23 @@
         </p:nvSpPr>
         <p:spPr>
           <a:xfrm>
-            <a:off x="4264528" y="2063392"/>
-            <a:ext cx="1713080" cy="370000"/>
-          </a:xfrm>
-          <a:prstGeom prst="rect">
-            <a:avLst/>
-          </a:prstGeom>
-          <a:noFill/>
-        </p:spPr>
-        <p:txBody>
-          <a:bodyPr wrap="square">
-            <a:spAutoFit/>
-          </a:bodyPr>
-          <a:lstStyle/>
-          <a:p>
-            <a:pPr algn="ctr"/>
-            <a:r>
-              <a:rPr sz="1000" b="1">
+            <a:off x="3637736" y="2063392"/>
+            <a:ext cx="1448760" cy="370000"/>
+          </a:xfrm>
+          <a:prstGeom prst="rect">
+            <a:avLst/>
+          </a:prstGeom>
+          <a:noFill/>
+        </p:spPr>
+        <p:txBody>
+          <a:bodyPr wrap="square">
+            <a:spAutoFit/>
+          </a:bodyPr>
+          <a:lstStyle/>
+          <a:p>
+            <a:pPr algn="ctr"/>
+            <a:r>
+              <a:rPr sz="950" b="1">
                 <a:solidFill>
                   <a:srgbClr val="4488FF"/>
                 </a:solidFill>
@@ -6189,23 +6189,23 @@
         </p:nvSpPr>
         <p:spPr>
           <a:xfrm>
-            <a:off x="4254528" y="2483392"/>
-            <a:ext cx="1728080" cy="470000"/>
-          </a:xfrm>
-          <a:prstGeom prst="rect">
-            <a:avLst/>
-          </a:prstGeom>
-          <a:noFill/>
-        </p:spPr>
-        <p:txBody>
-          <a:bodyPr wrap="square">
-            <a:spAutoFit/>
-          </a:bodyPr>
-          <a:lstStyle/>
-          <a:p>
-            <a:pPr algn="ctr"/>
-            <a:r>
-              <a:rPr sz="800" b="0">
+            <a:off x="3627736" y="2483392"/>
+            <a:ext cx="1463760" cy="470000"/>
+          </a:xfrm>
+          <a:prstGeom prst="rect">
+            <a:avLst/>
+          </a:prstGeom>
+          <a:noFill/>
+        </p:spPr>
+        <p:txBody>
+          <a:bodyPr wrap="square">
+            <a:spAutoFit/>
+          </a:bodyPr>
+          <a:lstStyle/>
+          <a:p>
+            <a:pPr algn="ctr"/>
+            <a:r>
+              <a:rPr sz="750" b="0">
                 <a:solidFill>
                   <a:srgbClr val="8890AA"/>
                 </a:solidFill>
@@ -6226,7 +6226,7 @@
         </p:nvSpPr>
         <p:spPr>
           <a:xfrm>
-            <a:off x="6019608" y="2443392"/>
+            <a:off x="5119496" y="2443392"/>
             <a:ext cx="200000" cy="180000"/>
           </a:xfrm>
           <a:prstGeom prst="can">
@@ -6269,8 +6269,8 @@
         </p:nvSpPr>
         <p:spPr>
           <a:xfrm>
-            <a:off x="6208776" y="1993392"/>
-            <a:ext cx="1783080" cy="1080000"/>
+            <a:off x="5266944" y="1993392"/>
+            <a:ext cx="1508760" cy="1080000"/>
           </a:xfrm>
           <a:prstGeom prst="rect">
             <a:avLst/>
@@ -6314,23 +6314,23 @@
         </p:nvSpPr>
         <p:spPr>
           <a:xfrm>
-            <a:off x="6248776" y="2063392"/>
-            <a:ext cx="1713080" cy="370000"/>
-          </a:xfrm>
-          <a:prstGeom prst="rect">
-            <a:avLst/>
-          </a:prstGeom>
-          <a:noFill/>
-        </p:spPr>
-        <p:txBody>
-          <a:bodyPr wrap="square">
-            <a:spAutoFit/>
-          </a:bodyPr>
-          <a:lstStyle/>
-          <a:p>
-            <a:pPr algn="ctr"/>
-            <a:r>
-              <a:rPr sz="1000" b="1">
+            <a:off x="5301944" y="2063392"/>
+            <a:ext cx="1448760" cy="370000"/>
+          </a:xfrm>
+          <a:prstGeom prst="rect">
+            <a:avLst/>
+          </a:prstGeom>
+          <a:noFill/>
+        </p:spPr>
+        <p:txBody>
+          <a:bodyPr wrap="square">
+            <a:spAutoFit/>
+          </a:bodyPr>
+          <a:lstStyle/>
+          <a:p>
+            <a:pPr algn="ctr"/>
+            <a:r>
+              <a:rPr sz="950" b="1">
                 <a:solidFill>
                   <a:srgbClr val="FFD060"/>
                 </a:solidFill>
@@ -6349,23 +6349,23 @@
         </p:nvSpPr>
         <p:spPr>
           <a:xfrm>
-            <a:off x="6238776" y="2483392"/>
-            <a:ext cx="1728080" cy="470000"/>
-          </a:xfrm>
-          <a:prstGeom prst="rect">
-            <a:avLst/>
-          </a:prstGeom>
-          <a:noFill/>
-        </p:spPr>
-        <p:txBody>
-          <a:bodyPr wrap="square">
-            <a:spAutoFit/>
-          </a:bodyPr>
-          <a:lstStyle/>
-          <a:p>
-            <a:pPr algn="ctr"/>
-            <a:r>
-              <a:rPr sz="800" b="0">
+            <a:off x="5291944" y="2483392"/>
+            <a:ext cx="1463760" cy="470000"/>
+          </a:xfrm>
+          <a:prstGeom prst="rect">
+            <a:avLst/>
+          </a:prstGeom>
+          <a:noFill/>
+        </p:spPr>
+        <p:txBody>
+          <a:bodyPr wrap="square">
+            <a:spAutoFit/>
+          </a:bodyPr>
+          <a:lstStyle/>
+          <a:p>
+            <a:pPr algn="ctr"/>
+            <a:r>
+              <a:rPr sz="750" b="0">
                 <a:solidFill>
                   <a:srgbClr val="8890AA"/>
                 </a:solidFill>
@@ -6380,25 +6380,23 @@
       </p:sp>
       <p:sp>
         <p:nvSpPr>
-          <p:cNvPr id="45" name="Rectangle 44"/>
+          <p:cNvPr id="45" name="Can 44"/>
           <p:cNvSpPr/>
           <p:nvPr/>
         </p:nvSpPr>
         <p:spPr>
           <a:xfrm>
-            <a:off x="8193024" y="1993392"/>
-            <a:ext cx="1417320" cy="1080000"/>
-          </a:xfrm>
-          <a:prstGeom prst="rect">
-            <a:avLst/>
-          </a:prstGeom>
-          <a:solidFill>
-            <a:srgbClr val="0C101E"/>
-          </a:solidFill>
-          <a:ln w="19050">
-            <a:solidFill>
-              <a:srgbClr val="22CCDD"/>
-            </a:solidFill>
+            <a:off x="6783704" y="2443392"/>
+            <a:ext cx="200000" cy="180000"/>
+          </a:xfrm>
+          <a:prstGeom prst="can">
+            <a:avLst/>
+          </a:prstGeom>
+          <a:solidFill>
+            <a:srgbClr val="C8A840"/>
+          </a:solidFill>
+          <a:ln>
+            <a:noFill/>
           </a:ln>
         </p:spPr>
         <p:style>
@@ -6431,17 +6429,19 @@
         </p:nvSpPr>
         <p:spPr>
           <a:xfrm>
-            <a:off x="8193024" y="1993392"/>
-            <a:ext cx="30000" cy="1080000"/>
-          </a:xfrm>
-          <a:prstGeom prst="rect">
-            <a:avLst/>
-          </a:prstGeom>
-          <a:solidFill>
-            <a:srgbClr val="22CCDD"/>
-          </a:solidFill>
-          <a:ln>
-            <a:noFill/>
+            <a:off x="6931152" y="1993392"/>
+            <a:ext cx="1508760" cy="1080000"/>
+          </a:xfrm>
+          <a:prstGeom prst="rect">
+            <a:avLst/>
+          </a:prstGeom>
+          <a:solidFill>
+            <a:srgbClr val="0C101E"/>
+          </a:solidFill>
+          <a:ln w="22860">
+            <a:solidFill>
+              <a:srgbClr val="22CCDD"/>
+            </a:solidFill>
           </a:ln>
         </p:spPr>
         <p:style>
@@ -6474,31 +6474,30 @@
         </p:nvSpPr>
         <p:spPr>
           <a:xfrm>
-            <a:off x="8243024" y="2063392"/>
-            <a:ext cx="1188720" cy="310000"/>
-          </a:xfrm>
-          <a:prstGeom prst="rect">
-            <a:avLst/>
-          </a:prstGeom>
-          <a:noFill/>
-        </p:spPr>
-        <p:txBody>
-          <a:bodyPr wrap="square">
-            <a:spAutoFit/>
-          </a:bodyPr>
-          <a:lstStyle/>
-          <a:p>
-            <a:pPr algn="ctr"/>
-            <a:r>
-              <a:rPr sz="900" b="1">
+            <a:off x="6966152" y="2063392"/>
+            <a:ext cx="1448760" cy="370000"/>
+          </a:xfrm>
+          <a:prstGeom prst="rect">
+            <a:avLst/>
+          </a:prstGeom>
+          <a:noFill/>
+        </p:spPr>
+        <p:txBody>
+          <a:bodyPr wrap="square">
+            <a:spAutoFit/>
+          </a:bodyPr>
+          <a:lstStyle/>
+          <a:p>
+            <a:pPr algn="ctr"/>
+            <a:r>
+              <a:rPr sz="950" b="1">
                 <a:solidFill>
                   <a:srgbClr val="22CCDD"/>
                 </a:solidFill>
                 <a:latin typeface="游明朝"/>
               </a:rPr>
               <a:t>引き戻し
-状態
-(AT後)</a:t>
+状態(AT後)</a:t>
             </a:r>
           </a:p>
         </p:txBody>
@@ -6511,8 +6510,8 @@
         </p:nvSpPr>
         <p:spPr>
           <a:xfrm>
-            <a:off x="8243024" y="2483392"/>
-            <a:ext cx="1188720" cy="460000"/>
+            <a:off x="6956152" y="2483392"/>
+            <a:ext cx="1463760" cy="470000"/>
           </a:xfrm>
           <a:prstGeom prst="rect">
             <a:avLst/>
@@ -6529,7 +6528,7 @@
             <a:r>
               <a:rPr sz="750" b="0">
                 <a:solidFill>
-                  <a:srgbClr val="F0ECE8"/>
+                  <a:srgbClr val="8890AA"/>
                 </a:solidFill>
                 <a:latin typeface="メイリオ"/>
               </a:rPr>
@@ -6548,7 +6547,7 @@
         </p:nvSpPr>
         <p:spPr>
           <a:xfrm>
-            <a:off x="256032" y="3093392"/>
+            <a:off x="274320" y="3093392"/>
             <a:ext cx="5029200" cy="260000"/>
           </a:xfrm>
           <a:prstGeom prst="rect">
@@ -6583,7 +6582,7 @@
         </p:nvSpPr>
         <p:spPr>
           <a:xfrm>
-            <a:off x="256032" y="3333392"/>
+            <a:off x="274320" y="3333392"/>
             <a:ext cx="5029200" cy="5000"/>
           </a:xfrm>
           <a:prstGeom prst="rect">
